--- a/presentations/copilot-cli-real-infra-deck.pptx
+++ b/presentations/copilot-cli-real-infra-deck.pptx
@@ -1175,25 +1175,31 @@
           <a:lstStyle/>
           <a:p>
             <a:r>
-              <a:t>5:15-8:15. Narrate the permissions, not the output — the room can read the terminal, but it cannot see why you configured it this way.</a:t>
+              <a:t>5:15-8:15. Narrate the flags before you hit enter -- that is the slide. Four tools, no shell, no writes, no cloud credentials.</a:t>
             </a:r>
           </a:p>
           <a:p/>
           <a:p>
             <a:r>
-              <a:t>Expected diagnosis: the workflow is missing 'id-token: write', so the OIDC token request variables were never set. Say clearly that this permission lets the job REQUEST a token; the provider trust conditions and cloud IAM still decide what that token is worth. This log takes us to the first failure, not to a working pipeline.</a:t>
+              <a:t>Expected diagnosis: the workflow never requested an OIDC token, so the auth step had nothing to exchange. Adding 'id-token: write' fixes this log -- it does not grant access to anything. Provider trust conditions and resource IAM still decide what the token is worth.</a:t>
             </a:r>
           </a:p>
           <a:p/>
           <a:p>
             <a:r>
-              <a:t>Park the observation that nothing prompted. You take it apart on slide 9.</a:t>
+              <a:t>Park the observation that nothing prompted. It comes back on slide 9.</a:t>
             </a:r>
           </a:p>
           <a:p/>
           <a:p>
             <a:r>
-              <a:t>If it stalls for 45 seconds, cut to the recording. Do not debug live.</a:t>
+              <a:t>Then the log's last four lines: a planted instruction arriving in contributor build output. The agent read it as information. It could not act on it here because I took the shell away -- a configuration choice, not a property of the tool. Read-only is the input channel.</a:t>
+            </a:r>
+          </a:p>
+          <a:p/>
+          <a:p>
+            <a:r>
+              <a:t>If it stalls for 45 seconds, cut to the recording.</a:t>
             </a:r>
           </a:p>
         </p:txBody>
@@ -1263,31 +1269,31 @@
           <a:lstStyle/>
           <a:p>
             <a:r>
-              <a:t>8:15-11:45. Write is deliberately not allow-listed, so the first write approval should appear on the projector. Approve it live and point at it. If no prompt appears, say so and check saved grants — that is a finding, not a reason to pretend.</a:t>
+              <a:t>8:15-11:45. Point at what is NOT in --allow-tool: writes. So the first edit should prompt, on screen. Approve exactly that one. If no prompt appears, say so -- that is a finding, not something to explain away.</a:t>
             </a:r>
           </a:p>
           <a:p/>
           <a:p>
             <a:r>
-              <a:t>The line that matters on the diff: uniform bucket-level access alone would still leave a public IAM grant in place. A flag that sounds like hardening is not enough; review the access that remains.</a:t>
+              <a:t>Point at the deny list too: each command appears twice. ':*' matches the stem followed by a SPACE, so shell(terraform:*) catches 'terraform apply' but not a bare 'terraform'. Both spellings, or the gap is real.</a:t>
             </a:r>
           </a:p>
           <a:p/>
           <a:p>
             <a:r>
-              <a:t>Then: this is a branch. Nothing reached an environment. A human opens the PR and CI applies with its own identity.</a:t>
+              <a:t>On the diff, in order: the allUsers grant goes, public access prevention becomes explicit, uniform access, versioning on. Number one is the point -- uniform access alone SOUNDS like hardening and would have left the public grant in place.</a:t>
             </a:r>
           </a:p>
           <a:p/>
           <a:p>
             <a:r>
-              <a:t>Show the diff in the REVIEW terminal, not by asking the model: git -C "$DEMO_WORKSPACE" --no-pager diff -- terraform/main.tf</a:t>
+              <a:t>Show the diff in terminal 2: git --no-pager diff -- terraform/main.tf</a:t>
             </a:r>
           </a:p>
           <a:p/>
           <a:p>
             <a:r>
-              <a:t>While it streams, narrate the four risks you expect rather than watching in silence. If it prints a diff in chat instead of editing, say 'edit the file in place' and move on.</a:t>
+              <a:t>This is a branch. Nothing reached an environment.</a:t>
             </a:r>
           </a:p>
         </p:txBody>
@@ -1357,31 +1363,37 @@
           <a:lstStyle/>
           <a:p>
             <a:r>
-              <a:t>11:45-14:45. Two observations, and they must not be blurred.</a:t>
+              <a:t>11:45-14:45. Three requests, three outcomes, and they must not blur.</a:t>
             </a:r>
           </a:p>
           <a:p/>
           <a:p>
             <a:r>
-              <a:t>First the direct-fix request. If the agent declines from AGENTS.md, say: that is instruction following. We have not observed a permission boundary yet.</a:t>
+              <a:t>First the direct-fix request. If it declines from AGENTS.md: that is instruction following, not a permission boundary.</a:t>
             </a:r>
           </a:p>
           <a:p/>
           <a:p>
             <a:r>
-              <a:t>Then the probe pair. Both command names resolve to the same harmless local stub that cannot touch a cloud. 'az --version' is the positive control: it is allowed, it runs, the marker proves the fake binary is real and reachable. 'gcloud --version' is identical in shape but denied. If the deny works, the marker never appears.</a:t>
+              <a:t>Then the probe pair. Both names resolve to the same inert local stub. 'az --version' is allow-listed -- it runs, the marker prints, and that proves the fake binary is real and reachable and that the model does what I ask. 'gcloud --version' is identical in shape and denied.</a:t>
             </a:r>
           </a:p>
           <a:p/>
           <a:p>
             <a:r>
-              <a:t>Classify out loud: a CLI tool-rule denial, a model refusal with no tool call, or the stub marker. Only the first is enforcement. The stub marker on the second probe would mean the deny missed — say so.</a:t>
+              <a:t>Without the control, a working deny produces no output, and nobody can tell enforcement from a model that quietly declined.</a:t>
             </a:r>
           </a:p>
           <a:p/>
           <a:p>
             <a:r>
-              <a:t>Then /sandbox policy. Do not read it aloud. Point at three things: the denied .env, the write directory, allowOutbound false.</a:t>
+              <a:t>If the marker appears on the DENIED probe, the deny missed. Say so.</a:t>
+            </a:r>
+          </a:p>
+          <a:p/>
+          <a:p>
+            <a:r>
+              <a:t>Then /sandbox policy. Do not read it aloud -- point at the denied .env, the writable path, and allowOutbound false.</a:t>
             </a:r>
           </a:p>
         </p:txBody>
@@ -9853,8 +9865,8 @@
         </p:nvSpPr>
         <p:spPr>
           <a:xfrm>
-            <a:off x="596900" y="1473200"/>
-            <a:ext cx="10998200" cy="1320800"/>
+            <a:off x="596900" y="1422400"/>
+            <a:ext cx="10998200" cy="787400"/>
           </a:xfrm>
           <a:prstGeom prst="rect">
             <a:avLst/>
@@ -9897,8 +9909,8 @@
         </p:nvSpPr>
         <p:spPr>
           <a:xfrm>
-            <a:off x="596900" y="1473200"/>
-            <a:ext cx="50800" cy="1320800"/>
+            <a:off x="596900" y="1422400"/>
+            <a:ext cx="50800" cy="787400"/>
           </a:xfrm>
           <a:prstGeom prst="rect">
             <a:avLst/>
@@ -9941,8 +9953,8 @@
         </p:nvSpPr>
         <p:spPr>
           <a:xfrm>
-            <a:off x="952500" y="1473200"/>
-            <a:ext cx="10287000" cy="1320800"/>
+            <a:off x="952500" y="1422400"/>
+            <a:ext cx="10287000" cy="787400"/>
           </a:xfrm>
           <a:prstGeom prst="rect">
             <a:avLst/>
@@ -9961,7 +9973,7 @@
               </a:lnSpc>
             </a:pPr>
             <a:r>
-              <a:rPr sz="2600" b="1">
+              <a:rPr sz="2300" b="1">
                 <a:solidFill>
                   <a:srgbClr val="E6EDF3"/>
                 </a:solidFill>
@@ -9980,14 +9992,14 @@
         </p:nvSpPr>
         <p:spPr>
           <a:xfrm>
-            <a:off x="596900" y="3149600"/>
-            <a:ext cx="965200" cy="508000"/>
+            <a:off x="596900" y="2489200"/>
+            <a:ext cx="10998200" cy="1879600"/>
           </a:xfrm>
           <a:prstGeom prst="rect">
             <a:avLst/>
           </a:prstGeom>
           <a:solidFill>
-            <a:srgbClr val="161B22"/>
+            <a:srgbClr val="010409"/>
           </a:solidFill>
           <a:ln>
             <a:noFill/>
@@ -10018,59 +10030,20 @@
       </p:sp>
       <p:sp>
         <p:nvSpPr>
-          <p:cNvPr id="9" name="TextBox 8"/>
-          <p:cNvSpPr txBox="1"/>
-          <p:nvPr/>
-        </p:nvSpPr>
-        <p:spPr>
-          <a:xfrm>
-            <a:off x="596900" y="3149600"/>
-            <a:ext cx="965200" cy="508000"/>
-          </a:xfrm>
-          <a:prstGeom prst="rect">
-            <a:avLst/>
-          </a:prstGeom>
-          <a:noFill/>
-        </p:spPr>
-        <p:txBody>
-          <a:bodyPr wrap="square" lIns="0" rIns="0" tIns="0" bIns="0" anchor="ctr">
-            <a:spAutoFit/>
-          </a:bodyPr>
-          <a:lstStyle/>
-          <a:p>
-            <a:pPr algn="ctr">
-              <a:lnSpc>
-                <a:spcPct val="115000"/>
-              </a:lnSpc>
-            </a:pPr>
-            <a:r>
-              <a:rPr sz="1600" b="0">
-                <a:solidFill>
-                  <a:srgbClr val="58A6FF"/>
-                </a:solidFill>
-                <a:latin typeface="Courier New"/>
-              </a:rPr>
-              <a:t>view</a:t>
-            </a:r>
-          </a:p>
-        </p:txBody>
-      </p:sp>
-      <p:sp>
-        <p:nvSpPr>
-          <p:cNvPr id="10" name="Rectangle 9"/>
+          <p:cNvPr id="9" name="Rectangle 8"/>
           <p:cNvSpPr/>
           <p:nvPr/>
         </p:nvSpPr>
         <p:spPr>
           <a:xfrm>
-            <a:off x="1714500" y="3149600"/>
-            <a:ext cx="965200" cy="508000"/>
+            <a:off x="596900" y="2489200"/>
+            <a:ext cx="50800" cy="1879600"/>
           </a:xfrm>
           <a:prstGeom prst="rect">
             <a:avLst/>
           </a:prstGeom>
           <a:solidFill>
-            <a:srgbClr val="161B22"/>
+            <a:srgbClr val="F0883E"/>
           </a:solidFill>
           <a:ln>
             <a:noFill/>
@@ -10101,14 +10074,101 @@
       </p:sp>
       <p:sp>
         <p:nvSpPr>
+          <p:cNvPr id="10" name="TextBox 9"/>
+          <p:cNvSpPr txBox="1"/>
+          <p:nvPr/>
+        </p:nvSpPr>
+        <p:spPr>
+          <a:xfrm>
+            <a:off x="927100" y="2717800"/>
+            <a:ext cx="10337800" cy="1422400"/>
+          </a:xfrm>
+          <a:prstGeom prst="rect">
+            <a:avLst/>
+          </a:prstGeom>
+          <a:noFill/>
+        </p:spPr>
+        <p:txBody>
+          <a:bodyPr wrap="square" lIns="0" rIns="0" tIns="0" bIns="0" anchor="t">
+            <a:spAutoFit/>
+          </a:bodyPr>
+          <a:lstStyle/>
+          <a:p>
+            <a:pPr algn="l">
+              <a:lnSpc>
+                <a:spcPct val="145000"/>
+              </a:lnSpc>
+            </a:pPr>
+            <a:r>
+              <a:rPr sz="1700" b="0">
+                <a:solidFill>
+                  <a:srgbClr val="E6EDF3"/>
+                </a:solidFill>
+                <a:latin typeface="Courier New"/>
+              </a:rPr>
+              <a:t>COPILOT_HOME="$RO" copilot --experimental --sandbox \</a:t>
+            </a:r>
+          </a:p>
+          <a:p>
+            <a:pPr algn="l">
+              <a:lnSpc>
+                <a:spcPct val="145000"/>
+              </a:lnSpc>
+            </a:pPr>
+            <a:r>
+              <a:rPr sz="1700" b="0">
+                <a:solidFill>
+                  <a:srgbClr val="58A6FF"/>
+                </a:solidFill>
+                <a:latin typeface="Courier New"/>
+              </a:rPr>
+              <a:t>  --available-tools=view,grep,glob \</a:t>
+            </a:r>
+          </a:p>
+          <a:p>
+            <a:pPr algn="l">
+              <a:lnSpc>
+                <a:spcPct val="145000"/>
+              </a:lnSpc>
+            </a:pPr>
+            <a:r>
+              <a:rPr sz="1700" b="0">
+                <a:solidFill>
+                  <a:srgbClr val="3FB950"/>
+                </a:solidFill>
+                <a:latin typeface="Courier New"/>
+              </a:rPr>
+              <a:t>  --allow-tool=read \</a:t>
+            </a:r>
+          </a:p>
+          <a:p>
+            <a:pPr algn="l">
+              <a:lnSpc>
+                <a:spcPct val="145000"/>
+              </a:lnSpc>
+            </a:pPr>
+            <a:r>
+              <a:rPr sz="1700" b="0">
+                <a:solidFill>
+                  <a:srgbClr val="F85149"/>
+                </a:solidFill>
+                <a:latin typeface="Courier New"/>
+              </a:rPr>
+              <a:t>  --deny-tool=write,shell</a:t>
+            </a:r>
+          </a:p>
+        </p:txBody>
+      </p:sp>
+      <p:sp>
+        <p:nvSpPr>
           <p:cNvPr id="11" name="TextBox 10"/>
           <p:cNvSpPr txBox="1"/>
           <p:nvPr/>
         </p:nvSpPr>
         <p:spPr>
           <a:xfrm>
-            <a:off x="1714500" y="3149600"/>
-            <a:ext cx="965200" cy="508000"/>
+            <a:off x="596900" y="5029200"/>
+            <a:ext cx="10998200" cy="533400"/>
           </a:xfrm>
           <a:prstGeom prst="rect">
             <a:avLst/>
@@ -10121,362 +10181,19 @@
           </a:bodyPr>
           <a:lstStyle/>
           <a:p>
-            <a:pPr algn="ctr">
+            <a:pPr algn="l">
               <a:lnSpc>
                 <a:spcPct val="115000"/>
               </a:lnSpc>
             </a:pPr>
             <a:r>
-              <a:rPr sz="1600" b="0">
-                <a:solidFill>
-                  <a:srgbClr val="58A6FF"/>
-                </a:solidFill>
-                <a:latin typeface="Courier New"/>
-              </a:rPr>
-              <a:t>grep</a:t>
-            </a:r>
-          </a:p>
-        </p:txBody>
-      </p:sp>
-      <p:sp>
-        <p:nvSpPr>
-          <p:cNvPr id="12" name="Rectangle 11"/>
-          <p:cNvSpPr/>
-          <p:nvPr/>
-        </p:nvSpPr>
-        <p:spPr>
-          <a:xfrm>
-            <a:off x="2832100" y="3149600"/>
-            <a:ext cx="965200" cy="508000"/>
-          </a:xfrm>
-          <a:prstGeom prst="rect">
-            <a:avLst/>
-          </a:prstGeom>
-          <a:solidFill>
-            <a:srgbClr val="161B22"/>
-          </a:solidFill>
-          <a:ln>
-            <a:noFill/>
-          </a:ln>
-          <a:effectLst/>
-        </p:spPr>
-        <p:style>
-          <a:lnRef idx="1">
-            <a:schemeClr val="accent1"/>
-          </a:lnRef>
-          <a:fillRef idx="3">
-            <a:schemeClr val="accent1"/>
-          </a:fillRef>
-          <a:effectRef idx="2">
-            <a:schemeClr val="accent1"/>
-          </a:effectRef>
-          <a:fontRef idx="minor">
-            <a:schemeClr val="lt1"/>
-          </a:fontRef>
-        </p:style>
-        <p:txBody>
-          <a:bodyPr rtlCol="0" anchor="ctr"/>
-          <a:lstStyle/>
-          <a:p>
-            <a:pPr algn="ctr"/>
-          </a:p>
-        </p:txBody>
-      </p:sp>
-      <p:sp>
-        <p:nvSpPr>
-          <p:cNvPr id="13" name="TextBox 12"/>
-          <p:cNvSpPr txBox="1"/>
-          <p:nvPr/>
-        </p:nvSpPr>
-        <p:spPr>
-          <a:xfrm>
-            <a:off x="2832100" y="3149600"/>
-            <a:ext cx="965200" cy="508000"/>
-          </a:xfrm>
-          <a:prstGeom prst="rect">
-            <a:avLst/>
-          </a:prstGeom>
-          <a:noFill/>
-        </p:spPr>
-        <p:txBody>
-          <a:bodyPr wrap="square" lIns="0" rIns="0" tIns="0" bIns="0" anchor="ctr">
-            <a:spAutoFit/>
-          </a:bodyPr>
-          <a:lstStyle/>
-          <a:p>
-            <a:pPr algn="ctr">
-              <a:lnSpc>
-                <a:spcPct val="115000"/>
-              </a:lnSpc>
-            </a:pPr>
-            <a:r>
-              <a:rPr sz="1600" b="0">
-                <a:solidFill>
-                  <a:srgbClr val="58A6FF"/>
-                </a:solidFill>
-                <a:latin typeface="Courier New"/>
-              </a:rPr>
-              <a:t>glob</a:t>
-            </a:r>
-          </a:p>
-        </p:txBody>
-      </p:sp>
-      <p:sp>
-        <p:nvSpPr>
-          <p:cNvPr id="14" name="Rectangle 13"/>
-          <p:cNvSpPr/>
-          <p:nvPr/>
-        </p:nvSpPr>
-        <p:spPr>
-          <a:xfrm>
-            <a:off x="3949700" y="3149600"/>
-            <a:ext cx="2108200" cy="508000"/>
-          </a:xfrm>
-          <a:prstGeom prst="rect">
-            <a:avLst/>
-          </a:prstGeom>
-          <a:solidFill>
-            <a:srgbClr val="161B22"/>
-          </a:solidFill>
-          <a:ln>
-            <a:noFill/>
-          </a:ln>
-          <a:effectLst/>
-        </p:spPr>
-        <p:style>
-          <a:lnRef idx="1">
-            <a:schemeClr val="accent1"/>
-          </a:lnRef>
-          <a:fillRef idx="3">
-            <a:schemeClr val="accent1"/>
-          </a:fillRef>
-          <a:effectRef idx="2">
-            <a:schemeClr val="accent1"/>
-          </a:effectRef>
-          <a:fontRef idx="minor">
-            <a:schemeClr val="lt1"/>
-          </a:fontRef>
-        </p:style>
-        <p:txBody>
-          <a:bodyPr rtlCol="0" anchor="ctr"/>
-          <a:lstStyle/>
-          <a:p>
-            <a:pPr algn="ctr"/>
-          </a:p>
-        </p:txBody>
-      </p:sp>
-      <p:sp>
-        <p:nvSpPr>
-          <p:cNvPr id="15" name="TextBox 14"/>
-          <p:cNvSpPr txBox="1"/>
-          <p:nvPr/>
-        </p:nvSpPr>
-        <p:spPr>
-          <a:xfrm>
-            <a:off x="3949700" y="3149600"/>
-            <a:ext cx="2108200" cy="508000"/>
-          </a:xfrm>
-          <a:prstGeom prst="rect">
-            <a:avLst/>
-          </a:prstGeom>
-          <a:noFill/>
-        </p:spPr>
-        <p:txBody>
-          <a:bodyPr wrap="square" lIns="0" rIns="0" tIns="0" bIns="0" anchor="ctr">
-            <a:spAutoFit/>
-          </a:bodyPr>
-          <a:lstStyle/>
-          <a:p>
-            <a:pPr algn="ctr">
-              <a:lnSpc>
-                <a:spcPct val="115000"/>
-              </a:lnSpc>
-            </a:pPr>
-            <a:r>
-              <a:rPr sz="1600" b="0">
-                <a:solidFill>
-                  <a:srgbClr val="F85149"/>
-                </a:solidFill>
-                <a:latin typeface="Courier New"/>
-              </a:rPr>
-              <a:t>shell: denied</a:t>
-            </a:r>
-          </a:p>
-        </p:txBody>
-      </p:sp>
-      <p:sp>
-        <p:nvSpPr>
-          <p:cNvPr id="16" name="Rectangle 15"/>
-          <p:cNvSpPr/>
-          <p:nvPr/>
-        </p:nvSpPr>
-        <p:spPr>
-          <a:xfrm>
-            <a:off x="6210300" y="3149600"/>
-            <a:ext cx="2108200" cy="508000"/>
-          </a:xfrm>
-          <a:prstGeom prst="rect">
-            <a:avLst/>
-          </a:prstGeom>
-          <a:solidFill>
-            <a:srgbClr val="161B22"/>
-          </a:solidFill>
-          <a:ln>
-            <a:noFill/>
-          </a:ln>
-          <a:effectLst/>
-        </p:spPr>
-        <p:style>
-          <a:lnRef idx="1">
-            <a:schemeClr val="accent1"/>
-          </a:lnRef>
-          <a:fillRef idx="3">
-            <a:schemeClr val="accent1"/>
-          </a:fillRef>
-          <a:effectRef idx="2">
-            <a:schemeClr val="accent1"/>
-          </a:effectRef>
-          <a:fontRef idx="minor">
-            <a:schemeClr val="lt1"/>
-          </a:fontRef>
-        </p:style>
-        <p:txBody>
-          <a:bodyPr rtlCol="0" anchor="ctr"/>
-          <a:lstStyle/>
-          <a:p>
-            <a:pPr algn="ctr"/>
-          </a:p>
-        </p:txBody>
-      </p:sp>
-      <p:sp>
-        <p:nvSpPr>
-          <p:cNvPr id="17" name="TextBox 16"/>
-          <p:cNvSpPr txBox="1"/>
-          <p:nvPr/>
-        </p:nvSpPr>
-        <p:spPr>
-          <a:xfrm>
-            <a:off x="6210300" y="3149600"/>
-            <a:ext cx="2108200" cy="508000"/>
-          </a:xfrm>
-          <a:prstGeom prst="rect">
-            <a:avLst/>
-          </a:prstGeom>
-          <a:noFill/>
-        </p:spPr>
-        <p:txBody>
-          <a:bodyPr wrap="square" lIns="0" rIns="0" tIns="0" bIns="0" anchor="ctr">
-            <a:spAutoFit/>
-          </a:bodyPr>
-          <a:lstStyle/>
-          <a:p>
-            <a:pPr algn="ctr">
-              <a:lnSpc>
-                <a:spcPct val="115000"/>
-              </a:lnSpc>
-            </a:pPr>
-            <a:r>
-              <a:rPr sz="1600" b="0">
-                <a:solidFill>
-                  <a:srgbClr val="F85149"/>
-                </a:solidFill>
-                <a:latin typeface="Courier New"/>
-              </a:rPr>
-              <a:t>write: denied</a:t>
-            </a:r>
-          </a:p>
-        </p:txBody>
-      </p:sp>
-      <p:sp>
-        <p:nvSpPr>
-          <p:cNvPr id="18" name="TextBox 17"/>
-          <p:cNvSpPr txBox="1"/>
-          <p:nvPr/>
-        </p:nvSpPr>
-        <p:spPr>
-          <a:xfrm>
-            <a:off x="596900" y="3962400"/>
-            <a:ext cx="10998200" cy="1143000"/>
-          </a:xfrm>
-          <a:prstGeom prst="rect">
-            <a:avLst/>
-          </a:prstGeom>
-          <a:noFill/>
-        </p:spPr>
-        <p:txBody>
-          <a:bodyPr wrap="square" lIns="0" rIns="0" tIns="0" bIns="0" anchor="t">
-            <a:spAutoFit/>
-          </a:bodyPr>
-          <a:lstStyle/>
-          <a:p>
-            <a:pPr algn="l">
-              <a:lnSpc>
-                <a:spcPct val="145000"/>
-              </a:lnSpc>
-            </a:pPr>
-            <a:r>
-              <a:rPr sz="2000" b="0">
-                <a:solidFill>
-                  <a:srgbClr val="8B949E"/>
+              <a:rPr sz="1700" b="1">
+                <a:solidFill>
+                  <a:srgbClr val="F0883E"/>
                 </a:solidFill>
                 <a:latin typeface="Arial"/>
               </a:rPr>
-              <a:t>A synthetic failed-run log and the workflow beside it.</a:t>
-            </a:r>
-          </a:p>
-          <a:p>
-            <a:pPr algn="l">
-              <a:lnSpc>
-                <a:spcPct val="145000"/>
-              </a:lnSpc>
-            </a:pPr>
-            <a:r>
-              <a:rPr sz="2000" b="0">
-                <a:solidFill>
-                  <a:srgbClr val="8B949E"/>
-                </a:solidFill>
-                <a:latin typeface="Arial"/>
-              </a:rPr>
-              <a:t>No GitHub API call. No cloud credentials. No shell.</a:t>
-            </a:r>
-          </a:p>
-        </p:txBody>
-      </p:sp>
-      <p:sp>
-        <p:nvSpPr>
-          <p:cNvPr id="19" name="TextBox 18"/>
-          <p:cNvSpPr txBox="1"/>
-          <p:nvPr/>
-        </p:nvSpPr>
-        <p:spPr>
-          <a:xfrm>
-            <a:off x="596900" y="5740400"/>
-            <a:ext cx="10998200" cy="533400"/>
-          </a:xfrm>
-          <a:prstGeom prst="rect">
-            <a:avLst/>
-          </a:prstGeom>
-          <a:noFill/>
-        </p:spPr>
-        <p:txBody>
-          <a:bodyPr wrap="square" lIns="0" rIns="0" tIns="0" bIns="0" anchor="ctr">
-            <a:spAutoFit/>
-          </a:bodyPr>
-          <a:lstStyle/>
-          <a:p>
-            <a:pPr algn="l">
-              <a:lnSpc>
-                <a:spcPct val="115000"/>
-              </a:lnSpc>
-            </a:pPr>
-            <a:r>
-              <a:rPr sz="1700" b="1">
-                <a:solidFill>
-                  <a:srgbClr val="F0883E"/>
-                </a:solidFill>
-                <a:latin typeface="Arial"/>
-              </a:rPr>
-              <a:t>Watch what it never does: it never asks me for permission.</a:t>
+              <a:t>No shell at all. Watch what it never does: it never asks me for permission.</a:t>
             </a:r>
           </a:p>
         </p:txBody>
@@ -10637,8 +10354,8 @@
         </p:nvSpPr>
         <p:spPr>
           <a:xfrm>
-            <a:off x="596900" y="1473200"/>
-            <a:ext cx="10998200" cy="1320800"/>
+            <a:off x="596900" y="1422400"/>
+            <a:ext cx="10998200" cy="787400"/>
           </a:xfrm>
           <a:prstGeom prst="rect">
             <a:avLst/>
@@ -10681,8 +10398,8 @@
         </p:nvSpPr>
         <p:spPr>
           <a:xfrm>
-            <a:off x="596900" y="1473200"/>
-            <a:ext cx="50800" cy="1320800"/>
+            <a:off x="596900" y="1422400"/>
+            <a:ext cx="50800" cy="787400"/>
           </a:xfrm>
           <a:prstGeom prst="rect">
             <a:avLst/>
@@ -10725,8 +10442,8 @@
         </p:nvSpPr>
         <p:spPr>
           <a:xfrm>
-            <a:off x="952500" y="1473200"/>
-            <a:ext cx="10287000" cy="1320800"/>
+            <a:off x="952500" y="1422400"/>
+            <a:ext cx="10287000" cy="787400"/>
           </a:xfrm>
           <a:prstGeom prst="rect">
             <a:avLst/>
@@ -10745,7 +10462,7 @@
               </a:lnSpc>
             </a:pPr>
             <a:r>
-              <a:rPr sz="2600" b="1">
+              <a:rPr sz="2300" b="1">
                 <a:solidFill>
                   <a:srgbClr val="E6EDF3"/>
                 </a:solidFill>
@@ -10764,14 +10481,14 @@
         </p:nvSpPr>
         <p:spPr>
           <a:xfrm>
-            <a:off x="596900" y="3149600"/>
-            <a:ext cx="965200" cy="508000"/>
+            <a:off x="596900" y="2489200"/>
+            <a:ext cx="10998200" cy="2209800"/>
           </a:xfrm>
           <a:prstGeom prst="rect">
             <a:avLst/>
           </a:prstGeom>
           <a:solidFill>
-            <a:srgbClr val="161B22"/>
+            <a:srgbClr val="010409"/>
           </a:solidFill>
           <a:ln>
             <a:noFill/>
@@ -10802,59 +10519,20 @@
       </p:sp>
       <p:sp>
         <p:nvSpPr>
-          <p:cNvPr id="9" name="TextBox 8"/>
-          <p:cNvSpPr txBox="1"/>
-          <p:nvPr/>
-        </p:nvSpPr>
-        <p:spPr>
-          <a:xfrm>
-            <a:off x="596900" y="3149600"/>
-            <a:ext cx="965200" cy="508000"/>
-          </a:xfrm>
-          <a:prstGeom prst="rect">
-            <a:avLst/>
-          </a:prstGeom>
-          <a:noFill/>
-        </p:spPr>
-        <p:txBody>
-          <a:bodyPr wrap="square" lIns="0" rIns="0" tIns="0" bIns="0" anchor="ctr">
-            <a:spAutoFit/>
-          </a:bodyPr>
-          <a:lstStyle/>
-          <a:p>
-            <a:pPr algn="ctr">
-              <a:lnSpc>
-                <a:spcPct val="115000"/>
-              </a:lnSpc>
-            </a:pPr>
-            <a:r>
-              <a:rPr sz="1600" b="0">
-                <a:solidFill>
-                  <a:srgbClr val="3FB950"/>
-                </a:solidFill>
-                <a:latin typeface="Courier New"/>
-              </a:rPr>
-              <a:t>edit</a:t>
-            </a:r>
-          </a:p>
-        </p:txBody>
-      </p:sp>
-      <p:sp>
-        <p:nvSpPr>
-          <p:cNvPr id="10" name="Rectangle 9"/>
+          <p:cNvPr id="9" name="Rectangle 8"/>
           <p:cNvSpPr/>
           <p:nvPr/>
         </p:nvSpPr>
         <p:spPr>
           <a:xfrm>
-            <a:off x="1714500" y="3149600"/>
-            <a:ext cx="1219200" cy="508000"/>
+            <a:off x="596900" y="2489200"/>
+            <a:ext cx="50800" cy="2209800"/>
           </a:xfrm>
           <a:prstGeom prst="rect">
             <a:avLst/>
           </a:prstGeom>
           <a:solidFill>
-            <a:srgbClr val="161B22"/>
+            <a:srgbClr val="F0883E"/>
           </a:solidFill>
           <a:ln>
             <a:noFill/>
@@ -10885,14 +10563,117 @@
       </p:sp>
       <p:sp>
         <p:nvSpPr>
+          <p:cNvPr id="10" name="TextBox 9"/>
+          <p:cNvSpPr txBox="1"/>
+          <p:nvPr/>
+        </p:nvSpPr>
+        <p:spPr>
+          <a:xfrm>
+            <a:off x="927100" y="2717800"/>
+            <a:ext cx="10337800" cy="1752600"/>
+          </a:xfrm>
+          <a:prstGeom prst="rect">
+            <a:avLst/>
+          </a:prstGeom>
+          <a:noFill/>
+        </p:spPr>
+        <p:txBody>
+          <a:bodyPr wrap="square" lIns="0" rIns="0" tIns="0" bIns="0" anchor="t">
+            <a:spAutoFit/>
+          </a:bodyPr>
+          <a:lstStyle/>
+          <a:p>
+            <a:pPr algn="l">
+              <a:lnSpc>
+                <a:spcPct val="145000"/>
+              </a:lnSpc>
+            </a:pPr>
+            <a:r>
+              <a:rPr sz="1700" b="0">
+                <a:solidFill>
+                  <a:srgbClr val="E6EDF3"/>
+                </a:solidFill>
+                <a:latin typeface="Courier New"/>
+              </a:rPr>
+              <a:t>COPILOT_HOME="$RW" copilot --experimental --sandbox \</a:t>
+            </a:r>
+          </a:p>
+          <a:p>
+            <a:pPr algn="l">
+              <a:lnSpc>
+                <a:spcPct val="145000"/>
+              </a:lnSpc>
+            </a:pPr>
+            <a:r>
+              <a:rPr sz="1700" b="0">
+                <a:solidFill>
+                  <a:srgbClr val="58A6FF"/>
+                </a:solidFill>
+                <a:latin typeface="Courier New"/>
+              </a:rPr>
+              <a:t>  --available-tools=...,bash,edit,create,apply_patch \</a:t>
+            </a:r>
+          </a:p>
+          <a:p>
+            <a:pPr algn="l">
+              <a:lnSpc>
+                <a:spcPct val="145000"/>
+              </a:lnSpc>
+            </a:pPr>
+            <a:r>
+              <a:rPr sz="1700" b="0">
+                <a:solidFill>
+                  <a:srgbClr val="3FB950"/>
+                </a:solidFill>
+                <a:latin typeface="Courier New"/>
+              </a:rPr>
+              <a:t>  --allow-tool='read,shell(git status),shell(git diff)' \</a:t>
+            </a:r>
+          </a:p>
+          <a:p>
+            <a:pPr algn="l">
+              <a:lnSpc>
+                <a:spcPct val="145000"/>
+              </a:lnSpc>
+            </a:pPr>
+            <a:r>
+              <a:rPr sz="1700" b="0">
+                <a:solidFill>
+                  <a:srgbClr val="F85149"/>
+                </a:solidFill>
+                <a:latin typeface="Courier New"/>
+              </a:rPr>
+              <a:t>  --deny-tool='shell(git push),shell(terraform),</a:t>
+            </a:r>
+          </a:p>
+          <a:p>
+            <a:pPr algn="l">
+              <a:lnSpc>
+                <a:spcPct val="145000"/>
+              </a:lnSpc>
+            </a:pPr>
+            <a:r>
+              <a:rPr sz="1700" b="0">
+                <a:solidFill>
+                  <a:srgbClr val="F85149"/>
+                </a:solidFill>
+                <a:latin typeface="Courier New"/>
+              </a:rPr>
+              <a:t>               shell(terraform:*),shell(gcloud),shell(gcloud:*)'</a:t>
+            </a:r>
+          </a:p>
+        </p:txBody>
+      </p:sp>
+      <p:sp>
+        <p:nvSpPr>
           <p:cNvPr id="11" name="TextBox 10"/>
           <p:cNvSpPr txBox="1"/>
           <p:nvPr/>
         </p:nvSpPr>
         <p:spPr>
           <a:xfrm>
-            <a:off x="1714500" y="3149600"/>
-            <a:ext cx="1219200" cy="508000"/>
+            <a:off x="596900" y="5359400"/>
+            <a:ext cx="10998200" cy="533400"/>
           </a:xfrm>
           <a:prstGeom prst="rect">
             <a:avLst/>
@@ -10905,196 +10686,19 @@
           </a:bodyPr>
           <a:lstStyle/>
           <a:p>
-            <a:pPr algn="ctr">
+            <a:pPr algn="l">
               <a:lnSpc>
                 <a:spcPct val="115000"/>
               </a:lnSpc>
             </a:pPr>
             <a:r>
-              <a:rPr sz="1600" b="0">
-                <a:solidFill>
-                  <a:srgbClr val="3FB950"/>
-                </a:solidFill>
-                <a:latin typeface="Courier New"/>
-              </a:rPr>
-              <a:t>create</a:t>
-            </a:r>
-          </a:p>
-        </p:txBody>
-      </p:sp>
-      <p:sp>
-        <p:nvSpPr>
-          <p:cNvPr id="12" name="Rectangle 11"/>
-          <p:cNvSpPr/>
-          <p:nvPr/>
-        </p:nvSpPr>
-        <p:spPr>
-          <a:xfrm>
-            <a:off x="3086100" y="3149600"/>
-            <a:ext cx="3378200" cy="508000"/>
-          </a:xfrm>
-          <a:prstGeom prst="rect">
-            <a:avLst/>
-          </a:prstGeom>
-          <a:solidFill>
-            <a:srgbClr val="161B22"/>
-          </a:solidFill>
-          <a:ln>
-            <a:noFill/>
-          </a:ln>
-          <a:effectLst/>
-        </p:spPr>
-        <p:style>
-          <a:lnRef idx="1">
-            <a:schemeClr val="accent1"/>
-          </a:lnRef>
-          <a:fillRef idx="3">
-            <a:schemeClr val="accent1"/>
-          </a:fillRef>
-          <a:effectRef idx="2">
-            <a:schemeClr val="accent1"/>
-          </a:effectRef>
-          <a:fontRef idx="minor">
-            <a:schemeClr val="lt1"/>
-          </a:fontRef>
-        </p:style>
-        <p:txBody>
-          <a:bodyPr rtlCol="0" anchor="ctr"/>
-          <a:lstStyle/>
-          <a:p>
-            <a:pPr algn="ctr"/>
-          </a:p>
-        </p:txBody>
-      </p:sp>
-      <p:sp>
-        <p:nvSpPr>
-          <p:cNvPr id="13" name="TextBox 12"/>
-          <p:cNvSpPr txBox="1"/>
-          <p:nvPr/>
-        </p:nvSpPr>
-        <p:spPr>
-          <a:xfrm>
-            <a:off x="3086100" y="3149600"/>
-            <a:ext cx="3378200" cy="508000"/>
-          </a:xfrm>
-          <a:prstGeom prst="rect">
-            <a:avLst/>
-          </a:prstGeom>
-          <a:noFill/>
-        </p:spPr>
-        <p:txBody>
-          <a:bodyPr wrap="square" lIns="0" rIns="0" tIns="0" bIns="0" anchor="ctr">
-            <a:spAutoFit/>
-          </a:bodyPr>
-          <a:lstStyle/>
-          <a:p>
-            <a:pPr algn="ctr">
-              <a:lnSpc>
-                <a:spcPct val="115000"/>
-              </a:lnSpc>
-            </a:pPr>
-            <a:r>
-              <a:rPr sz="1600" b="0">
+              <a:rPr sz="1700" b="1">
                 <a:solidFill>
                   <a:srgbClr val="F0883E"/>
                 </a:solidFill>
-                <a:latin typeface="Courier New"/>
-              </a:rPr>
-              <a:t>write: NOT pre-approved</a:t>
-            </a:r>
-          </a:p>
-        </p:txBody>
-      </p:sp>
-      <p:sp>
-        <p:nvSpPr>
-          <p:cNvPr id="14" name="TextBox 13"/>
-          <p:cNvSpPr txBox="1"/>
-          <p:nvPr/>
-        </p:nvSpPr>
-        <p:spPr>
-          <a:xfrm>
-            <a:off x="596900" y="3962400"/>
-            <a:ext cx="10998200" cy="1143000"/>
-          </a:xfrm>
-          <a:prstGeom prst="rect">
-            <a:avLst/>
-          </a:prstGeom>
-          <a:noFill/>
-        </p:spPr>
-        <p:txBody>
-          <a:bodyPr wrap="square" lIns="0" rIns="0" tIns="0" bIns="0" anchor="t">
-            <a:spAutoFit/>
-          </a:bodyPr>
-          <a:lstStyle/>
-          <a:p>
-            <a:pPr algn="l">
-              <a:lnSpc>
-                <a:spcPct val="145000"/>
-              </a:lnSpc>
-            </a:pPr>
-            <a:r>
-              <a:rPr sz="2000" b="0">
-                <a:solidFill>
-                  <a:srgbClr val="8B949E"/>
-                </a:solidFill>
                 <a:latin typeface="Arial"/>
               </a:rPr>
-              <a:t>Four things to look for: the allUsers grant goes away, public access</a:t>
-            </a:r>
-          </a:p>
-          <a:p>
-            <a:pPr algn="l">
-              <a:lnSpc>
-                <a:spcPct val="145000"/>
-              </a:lnSpc>
-            </a:pPr>
-            <a:r>
-              <a:rPr sz="2000" b="0">
-                <a:solidFill>
-                  <a:srgbClr val="8B949E"/>
-                </a:solidFill>
-                <a:latin typeface="Arial"/>
-              </a:rPr>
-              <a:t>prevention becomes explicit, uniform access, versioning on.</a:t>
-            </a:r>
-          </a:p>
-        </p:txBody>
-      </p:sp>
-      <p:sp>
-        <p:nvSpPr>
-          <p:cNvPr id="15" name="TextBox 14"/>
-          <p:cNvSpPr txBox="1"/>
-          <p:nvPr/>
-        </p:nvSpPr>
-        <p:spPr>
-          <a:xfrm>
-            <a:off x="596900" y="5740400"/>
-            <a:ext cx="10998200" cy="533400"/>
-          </a:xfrm>
-          <a:prstGeom prst="rect">
-            <a:avLst/>
-          </a:prstGeom>
-          <a:noFill/>
-        </p:spPr>
-        <p:txBody>
-          <a:bodyPr wrap="square" lIns="0" rIns="0" tIns="0" bIns="0" anchor="ctr">
-            <a:spAutoFit/>
-          </a:bodyPr>
-          <a:lstStyle/>
-          <a:p>
-            <a:pPr algn="l">
-              <a:lnSpc>
-                <a:spcPct val="115000"/>
-              </a:lnSpc>
-            </a:pPr>
-            <a:r>
-              <a:rPr sz="1700" b="1">
-                <a:solidFill>
-                  <a:srgbClr val="F0883E"/>
-                </a:solidFill>
-                <a:latin typeface="Arial"/>
-              </a:rPr>
-              <a:t>Output is a diff on a branch. Not an apply.</a:t>
+              <a:t>Writes are not in --allow-tool. The first edit has to ask. Output is a diff on a branch.</a:t>
             </a:r>
           </a:p>
         </p:txBody>
@@ -11255,8 +10859,8 @@
         </p:nvSpPr>
         <p:spPr>
           <a:xfrm>
-            <a:off x="596900" y="1473200"/>
-            <a:ext cx="10998200" cy="1320800"/>
+            <a:off x="596900" y="1422400"/>
+            <a:ext cx="10998200" cy="787400"/>
           </a:xfrm>
           <a:prstGeom prst="rect">
             <a:avLst/>
@@ -11299,8 +10903,8 @@
         </p:nvSpPr>
         <p:spPr>
           <a:xfrm>
-            <a:off x="596900" y="1473200"/>
-            <a:ext cx="50800" cy="1320800"/>
+            <a:off x="596900" y="1422400"/>
+            <a:ext cx="50800" cy="787400"/>
           </a:xfrm>
           <a:prstGeom prst="rect">
             <a:avLst/>
@@ -11343,8 +10947,8 @@
         </p:nvSpPr>
         <p:spPr>
           <a:xfrm>
-            <a:off x="952500" y="1473200"/>
-            <a:ext cx="10287000" cy="1320800"/>
+            <a:off x="952500" y="1422400"/>
+            <a:ext cx="10287000" cy="787400"/>
           </a:xfrm>
           <a:prstGeom prst="rect">
             <a:avLst/>
@@ -11363,7 +10967,7 @@
               </a:lnSpc>
             </a:pPr>
             <a:r>
-              <a:rPr sz="2600" b="1">
+              <a:rPr sz="2300" b="1">
                 <a:solidFill>
                   <a:srgbClr val="E6EDF3"/>
                 </a:solidFill>
@@ -11382,174 +10986,8 @@
         </p:nvSpPr>
         <p:spPr>
           <a:xfrm>
-            <a:off x="596900" y="3149600"/>
-            <a:ext cx="2235200" cy="508000"/>
-          </a:xfrm>
-          <a:prstGeom prst="rect">
-            <a:avLst/>
-          </a:prstGeom>
-          <a:solidFill>
-            <a:srgbClr val="161B22"/>
-          </a:solidFill>
-          <a:ln>
-            <a:noFill/>
-          </a:ln>
-          <a:effectLst/>
-        </p:spPr>
-        <p:style>
-          <a:lnRef idx="1">
-            <a:schemeClr val="accent1"/>
-          </a:lnRef>
-          <a:fillRef idx="3">
-            <a:schemeClr val="accent1"/>
-          </a:fillRef>
-          <a:effectRef idx="2">
-            <a:schemeClr val="accent1"/>
-          </a:effectRef>
-          <a:fontRef idx="minor">
-            <a:schemeClr val="lt1"/>
-          </a:fontRef>
-        </p:style>
-        <p:txBody>
-          <a:bodyPr rtlCol="0" anchor="ctr"/>
-          <a:lstStyle/>
-          <a:p>
-            <a:pPr algn="ctr"/>
-          </a:p>
-        </p:txBody>
-      </p:sp>
-      <p:sp>
-        <p:nvSpPr>
-          <p:cNvPr id="9" name="TextBox 8"/>
-          <p:cNvSpPr txBox="1"/>
-          <p:nvPr/>
-        </p:nvSpPr>
-        <p:spPr>
-          <a:xfrm>
-            <a:off x="596900" y="3149600"/>
-            <a:ext cx="2235200" cy="508000"/>
-          </a:xfrm>
-          <a:prstGeom prst="rect">
-            <a:avLst/>
-          </a:prstGeom>
-          <a:noFill/>
-        </p:spPr>
-        <p:txBody>
-          <a:bodyPr wrap="square" lIns="0" rIns="0" tIns="0" bIns="0" anchor="ctr">
-            <a:spAutoFit/>
-          </a:bodyPr>
-          <a:lstStyle/>
-          <a:p>
-            <a:pPr algn="ctr">
-              <a:lnSpc>
-                <a:spcPct val="115000"/>
-              </a:lnSpc>
-            </a:pPr>
-            <a:r>
-              <a:rPr sz="1600" b="0">
-                <a:solidFill>
-                  <a:srgbClr val="F85149"/>
-                </a:solidFill>
-                <a:latin typeface="Courier New"/>
-              </a:rPr>
-              <a:t>gcloud: denied</a:t>
-            </a:r>
-          </a:p>
-        </p:txBody>
-      </p:sp>
-      <p:sp>
-        <p:nvSpPr>
-          <p:cNvPr id="10" name="Rectangle 9"/>
-          <p:cNvSpPr/>
-          <p:nvPr/>
-        </p:nvSpPr>
-        <p:spPr>
-          <a:xfrm>
-            <a:off x="2984500" y="3149600"/>
-            <a:ext cx="2870200" cy="508000"/>
-          </a:xfrm>
-          <a:prstGeom prst="rect">
-            <a:avLst/>
-          </a:prstGeom>
-          <a:solidFill>
-            <a:srgbClr val="161B22"/>
-          </a:solidFill>
-          <a:ln>
-            <a:noFill/>
-          </a:ln>
-          <a:effectLst/>
-        </p:spPr>
-        <p:style>
-          <a:lnRef idx="1">
-            <a:schemeClr val="accent1"/>
-          </a:lnRef>
-          <a:fillRef idx="3">
-            <a:schemeClr val="accent1"/>
-          </a:fillRef>
-          <a:effectRef idx="2">
-            <a:schemeClr val="accent1"/>
-          </a:effectRef>
-          <a:fontRef idx="minor">
-            <a:schemeClr val="lt1"/>
-          </a:fontRef>
-        </p:style>
-        <p:txBody>
-          <a:bodyPr rtlCol="0" anchor="ctr"/>
-          <a:lstStyle/>
-          <a:p>
-            <a:pPr algn="ctr"/>
-          </a:p>
-        </p:txBody>
-      </p:sp>
-      <p:sp>
-        <p:nvSpPr>
-          <p:cNvPr id="11" name="TextBox 10"/>
-          <p:cNvSpPr txBox="1"/>
-          <p:nvPr/>
-        </p:nvSpPr>
-        <p:spPr>
-          <a:xfrm>
-            <a:off x="2984500" y="3149600"/>
-            <a:ext cx="2870200" cy="508000"/>
-          </a:xfrm>
-          <a:prstGeom prst="rect">
-            <a:avLst/>
-          </a:prstGeom>
-          <a:noFill/>
-        </p:spPr>
-        <p:txBody>
-          <a:bodyPr wrap="square" lIns="0" rIns="0" tIns="0" bIns="0" anchor="ctr">
-            <a:spAutoFit/>
-          </a:bodyPr>
-          <a:lstStyle/>
-          <a:p>
-            <a:pPr algn="ctr">
-              <a:lnSpc>
-                <a:spcPct val="115000"/>
-              </a:lnSpc>
-            </a:pPr>
-            <a:r>
-              <a:rPr sz="1600" b="0">
-                <a:solidFill>
-                  <a:srgbClr val="3FB950"/>
-                </a:solidFill>
-                <a:latin typeface="Courier New"/>
-              </a:rPr>
-              <a:t>az: allowed control</a:t>
-            </a:r>
-          </a:p>
-        </p:txBody>
-      </p:sp>
-      <p:sp>
-        <p:nvSpPr>
-          <p:cNvPr id="12" name="Rectangle 11"/>
-          <p:cNvSpPr/>
-          <p:nvPr/>
-        </p:nvSpPr>
-        <p:spPr>
-          <a:xfrm>
-            <a:off x="596900" y="3810000"/>
-            <a:ext cx="10998200" cy="2082800"/>
+            <a:off x="596900" y="2489200"/>
+            <a:ext cx="10998200" cy="2209800"/>
           </a:xfrm>
           <a:prstGeom prst="rect">
             <a:avLst/>
@@ -11586,14 +11024,14 @@
       </p:sp>
       <p:sp>
         <p:nvSpPr>
-          <p:cNvPr id="13" name="Rectangle 12"/>
+          <p:cNvPr id="9" name="Rectangle 8"/>
           <p:cNvSpPr/>
           <p:nvPr/>
         </p:nvSpPr>
         <p:spPr>
           <a:xfrm>
-            <a:off x="596900" y="3810000"/>
-            <a:ext cx="50800" cy="2082800"/>
+            <a:off x="596900" y="2489200"/>
+            <a:ext cx="50800" cy="2209800"/>
           </a:xfrm>
           <a:prstGeom prst="rect">
             <a:avLst/>
@@ -11630,14 +11068,14 @@
       </p:sp>
       <p:sp>
         <p:nvSpPr>
-          <p:cNvPr id="14" name="TextBox 13"/>
+          <p:cNvPr id="10" name="TextBox 9"/>
           <p:cNvSpPr txBox="1"/>
           <p:nvPr/>
         </p:nvSpPr>
         <p:spPr>
           <a:xfrm>
-            <a:off x="927100" y="4038600"/>
-            <a:ext cx="10337800" cy="1625600"/>
+            <a:off x="927100" y="2717800"/>
+            <a:ext cx="10337800" cy="1752600"/>
           </a:xfrm>
           <a:prstGeom prst="rect">
             <a:avLst/>
@@ -11658,11 +11096,11 @@
             <a:r>
               <a:rPr sz="1700" b="0">
                 <a:solidFill>
-                  <a:srgbClr val="8B949E"/>
+                  <a:srgbClr val="3FB950"/>
                 </a:solidFill>
                 <a:latin typeface="Courier New"/>
               </a:rPr>
-              <a:t>$ az --version</a:t>
+              <a:t>  --allow-tool='read,shell(az --version)' \</a:t>
             </a:r>
           </a:p>
           <a:p>
@@ -11674,11 +11112,43 @@
             <a:r>
               <a:rPr sz="1700" b="0">
                 <a:solidFill>
+                  <a:srgbClr val="F85149"/>
+                </a:solidFill>
+                <a:latin typeface="Courier New"/>
+              </a:rPr>
+              <a:t>  --deny-tool='write,shell(gcloud),shell(gcloud:*)'</a:t>
+            </a:r>
+          </a:p>
+          <a:p>
+            <a:pPr algn="l">
+              <a:lnSpc>
+                <a:spcPct val="145000"/>
+              </a:lnSpc>
+            </a:pPr>
+            <a:r>
+              <a:rPr sz="1700" b="0">
+                <a:solidFill>
+                  <a:srgbClr val="E6EDF3"/>
+                </a:solidFill>
+                <a:latin typeface="Courier New"/>
+              </a:rPr>
+              <a:t/>
+            </a:r>
+          </a:p>
+          <a:p>
+            <a:pPr algn="l">
+              <a:lnSpc>
+                <a:spcPct val="145000"/>
+              </a:lnSpc>
+            </a:pPr>
+            <a:r>
+              <a:rPr sz="1700" b="0">
+                <a:solidFill>
                   <a:srgbClr val="3FB950"/>
                 </a:solidFill>
                 <a:latin typeface="Courier New"/>
               </a:rPr>
-              <a:t>DEMO_STUB_EXECUTED: fake az; no cloud operation occurred.</a:t>
+              <a:t>$ az --version     -&gt; DEMO_STUB_EXECUTED: fake az</a:t>
             </a:r>
           </a:p>
           <a:p>
@@ -11690,56 +11160,24 @@
             <a:r>
               <a:rPr sz="1700" b="0">
                 <a:solidFill>
-                  <a:srgbClr val="E6EDF3"/>
+                  <a:srgbClr val="F85149"/>
                 </a:solidFill>
                 <a:latin typeface="Courier New"/>
               </a:rPr>
-              <a:t/>
-            </a:r>
-          </a:p>
-          <a:p>
-            <a:pPr algn="l">
-              <a:lnSpc>
-                <a:spcPct val="145000"/>
-              </a:lnSpc>
-            </a:pPr>
-            <a:r>
-              <a:rPr sz="1700" b="0">
-                <a:solidFill>
-                  <a:srgbClr val="8B949E"/>
-                </a:solidFill>
-                <a:latin typeface="Courier New"/>
-              </a:rPr>
-              <a:t>$ gcloud --version</a:t>
-            </a:r>
-          </a:p>
-          <a:p>
-            <a:pPr algn="l">
-              <a:lnSpc>
-                <a:spcPct val="145000"/>
-              </a:lnSpc>
-            </a:pPr>
-            <a:r>
-              <a:rPr sz="1700" b="0">
-                <a:solidFill>
-                  <a:srgbClr val="F85149"/>
-                </a:solidFill>
-                <a:latin typeface="Courier New"/>
-              </a:rPr>
-              <a:t>denied by --deny-tool=shell(gcloud:*)</a:t>
-            </a:r>
-          </a:p>
-        </p:txBody>
-      </p:sp>
-      <p:sp>
-        <p:nvSpPr>
-          <p:cNvPr id="15" name="TextBox 14"/>
+              <a:t>$ gcloud --version -&gt; denied by tool rule</a:t>
+            </a:r>
+          </a:p>
+        </p:txBody>
+      </p:sp>
+      <p:sp>
+        <p:nvSpPr>
+          <p:cNvPr id="11" name="TextBox 10"/>
           <p:cNvSpPr txBox="1"/>
           <p:nvPr/>
         </p:nvSpPr>
         <p:spPr>
           <a:xfrm>
-            <a:off x="596900" y="6019800"/>
+            <a:off x="596900" y="5359400"/>
             <a:ext cx="10998200" cy="533400"/>
           </a:xfrm>
           <a:prstGeom prst="rect">
